--- a/courses/learn_partitioning/module03-01-multiway-partition/slides.pptx
+++ b/courses/learn_partitioning/module03-01-multiway-partition/slides.pptx
@@ -16,6 +16,9 @@
     <p:sldId id="264" r:id="rId16"/>
     <p:sldId id="265" r:id="rId17"/>
     <p:sldId id="266" r:id="rId18"/>
+    <p:sldId id="267" r:id="rId19"/>
+    <p:sldId id="268" r:id="rId20"/>
+    <p:sldId id="269" r:id="rId21"/>
   </p:sldIdLst>
   <p:sldSz cx="12191695" cy="6858000" type="screen4x3"/>
   <p:notesSz cx="6858000" cy="9144000"/>
@@ -582,7 +585,7 @@
           <a:lstStyle/>
           <a:p>
             <a:r>
-              <a:t>Common traps: optimizing cut while ignoring balance; reporting pairwise cut when the instance is a hypergraph; flipping locked terminals; and stopping before rollback to the best KL or FM prefix. For multilevel flows, verify coarsening before you blame the refiner.</a:t>
+              <a:t>In the browser lab track, open the **multiway-partition** lab from the tools shelf. Load the starter graph, run the algorithm once, and read cutsize and balance in the metrics panel. Work the challenges that lock the goldens, then come back to implement the same loop yourself.</a:t>
             </a:r>
           </a:p>
         </p:txBody>
@@ -652,6 +655,146 @@
           <a:lstStyle/>
           <a:p>
             <a:r>
+              <a:t>In the implement track, open this module's EXAMPLES.md Pseudocode section and the course common solvers. Parse the tiny graph, run the algorithm with a deterministic seed, and print the assignment plus cutsize and balance. Match the browser goldens before you claim the checklist.</a:t>
+            </a:r>
+          </a:p>
+        </p:txBody>
+      </p:sp>
+      <p:sp>
+        <p:nvSpPr>
+          <p:cNvPr id="4" name="Slide Number Placeholder 3"/>
+          <p:cNvSpPr>
+            <a:spLocks noGrp="1"/>
+          </p:cNvSpPr>
+          <p:nvPr>
+            <p:ph type="sldNum" idx="5" sz="quarter"/>
+          </p:nvPr>
+        </p:nvSpPr>
+        <p:spPr/>
+      </p:sp>
+    </p:spTree>
+  </p:cSld>
+  <p:clrMapOvr>
+    <a:masterClrMapping/>
+  </p:clrMapOvr>
+</p:notes>
+</file>
+
+<file path=ppt/notesSlides/notesSlide12.xml><?xml version="1.0" encoding="utf-8"?>
+<p:notes xmlns:a="http://schemas.openxmlformats.org/drawingml/2006/main" xmlns:p="http://schemas.openxmlformats.org/presentationml/2006/main" xmlns:r="http://schemas.openxmlformats.org/officeDocument/2006/relationships">
+  <p:cSld>
+    <p:spTree>
+      <p:nvGrpSpPr>
+        <p:cNvPr id="1" name=""/>
+        <p:cNvGrpSpPr/>
+        <p:nvPr/>
+      </p:nvGrpSpPr>
+      <p:grpSpPr>
+        <a:xfrm>
+          <a:off x="0" y="0"/>
+          <a:ext cx="0" cy="0"/>
+          <a:chOff x="0" y="0"/>
+          <a:chExt cx="0" cy="0"/>
+        </a:xfrm>
+      </p:grpSpPr>
+      <p:sp>
+        <p:nvSpPr>
+          <p:cNvPr id="2" name="Slide Image Placeholder 1"/>
+          <p:cNvSpPr>
+            <a:spLocks noGrp="1"/>
+          </p:cNvSpPr>
+          <p:nvPr>
+            <p:ph type="sldImg" idx="2"/>
+          </p:nvPr>
+        </p:nvSpPr>
+        <p:spPr/>
+      </p:sp>
+      <p:sp>
+        <p:nvSpPr>
+          <p:cNvPr id="3" name="Notes Placeholder 2"/>
+          <p:cNvSpPr>
+            <a:spLocks noGrp="1"/>
+          </p:cNvSpPr>
+          <p:nvPr>
+            <p:ph type="body" idx="3" sz="quarter"/>
+          </p:nvPr>
+        </p:nvSpPr>
+        <p:spPr/>
+        <p:txBody>
+          <a:bodyPr/>
+          <a:lstStyle/>
+          <a:p>
+            <a:r>
+              <a:t>Common traps: optimizing cut while ignoring balance; reporting pairwise cut when the instance is a hypergraph; flipping locked terminals; and stopping before rollback to the best KL or FM prefix. For multilevel flows, verify coarsening before you blame the refiner.</a:t>
+            </a:r>
+          </a:p>
+        </p:txBody>
+      </p:sp>
+      <p:sp>
+        <p:nvSpPr>
+          <p:cNvPr id="4" name="Slide Number Placeholder 3"/>
+          <p:cNvSpPr>
+            <a:spLocks noGrp="1"/>
+          </p:cNvSpPr>
+          <p:nvPr>
+            <p:ph type="sldNum" idx="5" sz="quarter"/>
+          </p:nvPr>
+        </p:nvSpPr>
+        <p:spPr/>
+      </p:sp>
+    </p:spTree>
+  </p:cSld>
+  <p:clrMapOvr>
+    <a:masterClrMapping/>
+  </p:clrMapOvr>
+</p:notes>
+</file>
+
+<file path=ppt/notesSlides/notesSlide13.xml><?xml version="1.0" encoding="utf-8"?>
+<p:notes xmlns:a="http://schemas.openxmlformats.org/drawingml/2006/main" xmlns:p="http://schemas.openxmlformats.org/presentationml/2006/main" xmlns:r="http://schemas.openxmlformats.org/officeDocument/2006/relationships">
+  <p:cSld>
+    <p:spTree>
+      <p:nvGrpSpPr>
+        <p:cNvPr id="1" name=""/>
+        <p:cNvGrpSpPr/>
+        <p:nvPr/>
+      </p:nvGrpSpPr>
+      <p:grpSpPr>
+        <a:xfrm>
+          <a:off x="0" y="0"/>
+          <a:ext cx="0" cy="0"/>
+          <a:chOff x="0" y="0"/>
+          <a:chExt cx="0" cy="0"/>
+        </a:xfrm>
+      </p:grpSpPr>
+      <p:sp>
+        <p:nvSpPr>
+          <p:cNvPr id="2" name="Slide Image Placeholder 1"/>
+          <p:cNvSpPr>
+            <a:spLocks noGrp="1"/>
+          </p:cNvSpPr>
+          <p:nvPr>
+            <p:ph type="sldImg" idx="2"/>
+          </p:nvPr>
+        </p:nvSpPr>
+        <p:spPr/>
+      </p:sp>
+      <p:sp>
+        <p:nvSpPr>
+          <p:cNvPr id="3" name="Notes Placeholder 2"/>
+          <p:cNvSpPr>
+            <a:spLocks noGrp="1"/>
+          </p:cNvSpPr>
+          <p:nvPr>
+            <p:ph type="body" idx="3" sz="quarter"/>
+          </p:nvPr>
+        </p:nvSpPr>
+        <p:spPr/>
+        <p:txBody>
+          <a:bodyPr/>
+          <a:lstStyle/>
+          <a:p>
+            <a:r>
               <a:t>Complete the checklist for at least one track—preferably both. Implement until your metrics match the starter goldens. When you’re ready, take the short quiz, then continue to the next module.</a:t>
             </a:r>
           </a:p>
@@ -725,12 +868,6 @@
               <a:t>Multiway objectives count every edge that leaves its part. Balance becomes a k-way size vector. Teaching point: recursive and direct multiway can disagree on cut even when both look balanced.</a:t>
             </a:r>
           </a:p>
-          <a:p/>
-          <a:p>
-            <a:r>
-              <a:t>&lt;!-- algorithm-walkthrough --&gt;</a:t>
-            </a:r>
-          </a:p>
         </p:txBody>
       </p:sp>
       <p:sp>
@@ -798,7 +935,13 @@
           <a:lstStyle/>
           <a:p>
             <a:r>
-              <a:t>Real placers need k&gt;2 parts. Recursive bisection respects graph structure; naive round-robin assigns nodes by index mod k — often catastrophic cut.</a:t>
+              <a:t>Multiway compares two constructors in pseudocode: recursive bisection to k, versus a naive round-robin labeling. Both must report the same cutsize metric.</a:t>
+            </a:r>
+          </a:p>
+          <a:p/>
+          <a:p>
+            <a:r>
+              <a:t>Open this module's examples file and find the Pseudocode section. That written sketch is what you implement on the implement track and what the browser challenges measure.</a:t>
             </a:r>
           </a:p>
         </p:txBody>
@@ -868,7 +1011,7 @@
           <a:lstStyle/>
           <a:p>
             <a:r>
-              <a:t>Recursive bisection to k=3 first splits ABC|DE (cut 3), then bisects ABC → AB|C|DE. A–B and D–E stay uncut; total cutsize is 8.</a:t>
+              <a:t>Recursive k equals three lands A B, C, and D E with cut eight. Alphabetical round-robin shreds heavy edges and scores about eighteen.</a:t>
             </a:r>
           </a:p>
         </p:txBody>
@@ -938,7 +1081,7 @@
           <a:lstStyle/>
           <a:p>
             <a:r>
-              <a:t>Alphabetical round-robin puts A,D on part 0; B,E on part 1; C alone on part 2. Almost every edge crosses — cutsize 18.</a:t>
+              <a:t>Real placers need k&gt;2 parts. Recursive bisection respects graph structure; naive round-robin assigns nodes by index mod k — often catastrophic cut.</a:t>
             </a:r>
           </a:p>
         </p:txBody>
@@ -1008,7 +1151,7 @@
           <a:lstStyle/>
           <a:p>
             <a:r>
-              <a:t>Round-robin cuts A–B(5) and D–E(5) — the two strongest edges. Recursive keeps them internal and pays only bridge cuts through C.</a:t>
+              <a:t>Recursive bisection to k=3 first splits ABC|DE (cut 3), then bisects ABC → AB|C|DE. A–B and D–E stay uncut; total cutsize is 8.</a:t>
             </a:r>
           </a:p>
         </p:txBody>
@@ -1078,13 +1221,7 @@
           <a:lstStyle/>
           <a:p>
             <a:r>
-              <a:t>Direct k-way FM exists in production tools, but recursive bisection is the teaching baseline: global structure emerges from local 2-way splits.</a:t>
-            </a:r>
-          </a:p>
-          <a:p/>
-          <a:p>
-            <a:r>
-              <a:t>&lt;!-- /algorithm-walkthrough --&gt;</a:t>
+              <a:t>Alphabetical round-robin puts A,D on part 0; B,E on part 1; C alone on part 2. Almost every edge crosses — cutsize 18.</a:t>
             </a:r>
           </a:p>
         </p:txBody>
@@ -1154,7 +1291,7 @@
           <a:lstStyle/>
           <a:p>
             <a:r>
-              <a:t>In the browser lab track, open the **multiway-partition** lab from the tools shelf. Load the starter graph, run the algorithm once, and read cutsize and balance in the metrics panel. Work the challenges that lock the goldens, then come back to implement the same loop yourself.</a:t>
+              <a:t>Round-robin cuts A–B(5) and D–E(5) — the two strongest edges. Recursive keeps them internal and pays only bridge cuts through C.</a:t>
             </a:r>
           </a:p>
         </p:txBody>
@@ -1224,7 +1361,7 @@
           <a:lstStyle/>
           <a:p>
             <a:r>
-              <a:t>In the implement track, open this module’s examples and the course `common/` solvers. Parse the tiny graph, run the algorithm with a deterministic seed, and print the assignment plus cutsize and balance. Match the browser goldens before you claim the checklist.</a:t>
+              <a:t>Direct k-way FM exists in production tools, but recursive bisection is the teaching baseline: global structure emerges from local 2-way splits.</a:t>
             </a:r>
           </a:p>
         </p:txBody>
@@ -4382,21 +4519,45 @@
                 </a:solidFill>
                 <a:latin typeface="Calibri"/>
               </a:rPr>
-              <a:t>Pitfalls</a:t>
-            </a:r>
-          </a:p>
-        </p:txBody>
-      </p:sp>
-      <p:sp>
-        <p:nvSpPr>
-          <p:cNvPr id="3" name="TextBox 2"/>
+              <a:t>Multiway literacy</a:t>
+            </a:r>
+          </a:p>
+        </p:txBody>
+      </p:sp>
+      <p:pic>
+        <p:nvPicPr>
+          <p:cNvPr id="3" name="Picture 2" descr="05-takeaway.png"/>
+          <p:cNvPicPr>
+            <a:picLocks noChangeAspect="1"/>
+          </p:cNvPicPr>
+          <p:nvPr/>
+        </p:nvPicPr>
+        <p:blipFill>
+          <a:blip r:embed="rId2"/>
+          <a:stretch>
+            <a:fillRect/>
+          </a:stretch>
+        </p:blipFill>
+        <p:spPr>
+          <a:xfrm>
+            <a:off x="548640" y="1143000"/>
+            <a:ext cx="9404113" cy="4572000"/>
+          </a:xfrm>
+          <a:prstGeom prst="rect">
+            <a:avLst/>
+          </a:prstGeom>
+        </p:spPr>
+      </p:pic>
+      <p:sp>
+        <p:nvSpPr>
+          <p:cNvPr id="4" name="TextBox 3"/>
           <p:cNvSpPr txBox="1"/>
           <p:nvPr/>
         </p:nvSpPr>
         <p:spPr>
           <a:xfrm>
-            <a:off x="548640" y="1234440"/>
-            <a:ext cx="11064240" cy="4937760"/>
+            <a:off x="548640" y="5897880"/>
+            <a:ext cx="11064240" cy="411480"/>
           </a:xfrm>
           <a:prstGeom prst="rect">
             <a:avLst/>
@@ -4409,54 +4570,26 @@
           </a:bodyPr>
           <a:lstStyle/>
           <a:p>
-            <a:pPr lvl="0" marL="457200" indent="-228600">
-              <a:buFont typeface="Calibri"/>
-              <a:spcAft>
-                <a:spcPts val="1000"/>
-              </a:spcAft>
-              <a:buSzPct val="100000"/>
-              <a:buChar char="•"/>
+            <a:pPr>
               <a:lnSpc>
                 <a:spcPts val="2200"/>
               </a:lnSpc>
             </a:pPr>
             <a:r>
-              <a:rPr sz="2000" b="0">
+              <a:rPr sz="1200" b="0">
                 <a:solidFill>
                   <a:srgbClr val="333333"/>
                 </a:solidFill>
                 <a:latin typeface="Calibri"/>
               </a:rPr>
-              <a:t>Common traps</a:t>
-            </a:r>
-          </a:p>
-          <a:p>
-            <a:pPr lvl="0" marL="457200" indent="-228600">
-              <a:buFont typeface="Calibri"/>
-              <a:spcAft>
-                <a:spcPts val="1000"/>
-              </a:spcAft>
-              <a:buSzPct val="100000"/>
-              <a:buChar char="•"/>
-              <a:lnSpc>
-                <a:spcPts val="2200"/>
-              </a:lnSpc>
-            </a:pPr>
-            <a:r>
-              <a:rPr sz="2000" b="0">
-                <a:solidFill>
-                  <a:srgbClr val="333333"/>
-                </a:solidFill>
-                <a:latin typeface="Calibri"/>
-              </a:rPr>
-              <a:t>For multilevel flows, verify coarsening before you blame the refiner</a:t>
-            </a:r>
-          </a:p>
-        </p:txBody>
-      </p:sp>
-      <p:sp>
-        <p:nvSpPr>
-          <p:cNvPr id="4" name="TextBox 3"/>
+              <a:t>Multiway literacy</a:t>
+            </a:r>
+          </a:p>
+        </p:txBody>
+      </p:sp>
+      <p:sp>
+        <p:nvSpPr>
+          <p:cNvPr id="5" name="TextBox 4"/>
           <p:cNvSpPr txBox="1"/>
           <p:nvPr/>
         </p:nvSpPr>
@@ -4545,6 +4678,557 @@
                 </a:solidFill>
                 <a:latin typeface="Calibri"/>
               </a:rPr>
+              <a:t>Browser lab track</a:t>
+            </a:r>
+          </a:p>
+        </p:txBody>
+      </p:sp>
+      <p:sp>
+        <p:nvSpPr>
+          <p:cNvPr id="3" name="TextBox 2"/>
+          <p:cNvSpPr txBox="1"/>
+          <p:nvPr/>
+        </p:nvSpPr>
+        <p:spPr>
+          <a:xfrm>
+            <a:off x="548640" y="1234440"/>
+            <a:ext cx="11064240" cy="4937760"/>
+          </a:xfrm>
+          <a:prstGeom prst="rect">
+            <a:avLst/>
+          </a:prstGeom>
+          <a:noFill/>
+        </p:spPr>
+        <p:txBody>
+          <a:bodyPr wrap="square">
+            <a:noAutofit/>
+          </a:bodyPr>
+          <a:lstStyle/>
+          <a:p>
+            <a:pPr lvl="0" marL="457200" indent="-228600">
+              <a:buFont typeface="Calibri"/>
+              <a:spcAft>
+                <a:spcPts val="1000"/>
+              </a:spcAft>
+              <a:buSzPct val="100000"/>
+              <a:buChar char="•"/>
+              <a:lnSpc>
+                <a:spcPts val="2200"/>
+              </a:lnSpc>
+            </a:pPr>
+            <a:r>
+              <a:rPr sz="2000" b="0">
+                <a:solidFill>
+                  <a:srgbClr val="333333"/>
+                </a:solidFill>
+                <a:latin typeface="Calibri"/>
+              </a:rPr>
+              <a:t>In the browser lab track, open the </a:t>
+            </a:r>
+            <a:r>
+              <a:rPr sz="2000" b="1">
+                <a:solidFill>
+                  <a:srgbClr val="333333"/>
+                </a:solidFill>
+                <a:latin typeface="Calibri"/>
+              </a:rPr>
+              <a:t>multiway-partition</a:t>
+            </a:r>
+            <a:r>
+              <a:rPr sz="2000" b="0">
+                <a:solidFill>
+                  <a:srgbClr val="333333"/>
+                </a:solidFill>
+                <a:latin typeface="Calibri"/>
+              </a:rPr>
+              <a:t> lab from the tools shelf</a:t>
+            </a:r>
+          </a:p>
+          <a:p>
+            <a:pPr lvl="0" marL="457200" indent="-228600">
+              <a:buFont typeface="Calibri"/>
+              <a:spcAft>
+                <a:spcPts val="1000"/>
+              </a:spcAft>
+              <a:buSzPct val="100000"/>
+              <a:buChar char="•"/>
+              <a:lnSpc>
+                <a:spcPts val="2200"/>
+              </a:lnSpc>
+            </a:pPr>
+            <a:r>
+              <a:rPr sz="2000" b="0">
+                <a:solidFill>
+                  <a:srgbClr val="333333"/>
+                </a:solidFill>
+                <a:latin typeface="Calibri"/>
+              </a:rPr>
+              <a:t>Load the starter graph, run the algorithm once</a:t>
+            </a:r>
+          </a:p>
+          <a:p>
+            <a:pPr lvl="0" marL="457200" indent="-228600">
+              <a:buFont typeface="Calibri"/>
+              <a:spcAft>
+                <a:spcPts val="1000"/>
+              </a:spcAft>
+              <a:buSzPct val="100000"/>
+              <a:buChar char="•"/>
+              <a:lnSpc>
+                <a:spcPts val="2200"/>
+              </a:lnSpc>
+            </a:pPr>
+            <a:r>
+              <a:rPr sz="2000" b="0">
+                <a:solidFill>
+                  <a:srgbClr val="333333"/>
+                </a:solidFill>
+                <a:latin typeface="Calibri"/>
+              </a:rPr>
+              <a:t>Work the challenges that lock the goldens</a:t>
+            </a:r>
+          </a:p>
+        </p:txBody>
+      </p:sp>
+      <p:sp>
+        <p:nvSpPr>
+          <p:cNvPr id="4" name="TextBox 3"/>
+          <p:cNvSpPr txBox="1"/>
+          <p:nvPr/>
+        </p:nvSpPr>
+        <p:spPr>
+          <a:xfrm>
+            <a:off x="548640" y="6355080"/>
+            <a:ext cx="11064240" cy="320040"/>
+          </a:xfrm>
+          <a:prstGeom prst="rect">
+            <a:avLst/>
+          </a:prstGeom>
+          <a:noFill/>
+        </p:spPr>
+        <p:txBody>
+          <a:bodyPr wrap="square">
+            <a:noAutofit/>
+          </a:bodyPr>
+          <a:lstStyle/>
+          <a:p>
+            <a:pPr algn="r">
+              <a:lnSpc>
+                <a:spcPts val="2200"/>
+              </a:lnSpc>
+              <a:defRPr sz="1000" b="0">
+                <a:solidFill>
+                  <a:srgbClr val="666666"/>
+                </a:solidFill>
+                <a:latin typeface="Calibri"/>
+              </a:defRPr>
+            </a:pPr>
+            <a:r>
+              <a:t>learn_partitioning — 01 multiway partition</a:t>
+            </a:r>
+          </a:p>
+        </p:txBody>
+      </p:sp>
+    </p:spTree>
+  </p:cSld>
+  <p:clrMapOvr>
+    <a:masterClrMapping/>
+  </p:clrMapOvr>
+</p:sld>
+</file>
+
+<file path=ppt/slides/slide12.xml><?xml version="1.0" encoding="utf-8"?>
+<p:sld xmlns:a="http://schemas.openxmlformats.org/drawingml/2006/main" xmlns:p="http://schemas.openxmlformats.org/presentationml/2006/main" xmlns:r="http://schemas.openxmlformats.org/officeDocument/2006/relationships">
+  <p:cSld>
+    <p:spTree>
+      <p:nvGrpSpPr>
+        <p:cNvPr id="1" name=""/>
+        <p:cNvGrpSpPr/>
+        <p:nvPr/>
+      </p:nvGrpSpPr>
+      <p:grpSpPr/>
+      <p:sp>
+        <p:nvSpPr>
+          <p:cNvPr id="2" name="TextBox 1"/>
+          <p:cNvSpPr txBox="1"/>
+          <p:nvPr/>
+        </p:nvSpPr>
+        <p:spPr>
+          <a:xfrm>
+            <a:off x="548640" y="411480"/>
+            <a:ext cx="11064240" cy="777240"/>
+          </a:xfrm>
+          <a:prstGeom prst="rect">
+            <a:avLst/>
+          </a:prstGeom>
+          <a:noFill/>
+        </p:spPr>
+        <p:txBody>
+          <a:bodyPr wrap="square">
+            <a:noAutofit/>
+          </a:bodyPr>
+          <a:lstStyle/>
+          <a:p>
+            <a:pPr>
+              <a:lnSpc>
+                <a:spcPts val="2200"/>
+              </a:lnSpc>
+            </a:pPr>
+            <a:r>
+              <a:rPr sz="2800" b="1">
+                <a:solidFill>
+                  <a:srgbClr val="1A1A2E"/>
+                </a:solidFill>
+                <a:latin typeface="Calibri"/>
+              </a:rPr>
+              <a:t>Implement track</a:t>
+            </a:r>
+          </a:p>
+        </p:txBody>
+      </p:sp>
+      <p:sp>
+        <p:nvSpPr>
+          <p:cNvPr id="3" name="TextBox 2"/>
+          <p:cNvSpPr txBox="1"/>
+          <p:nvPr/>
+        </p:nvSpPr>
+        <p:spPr>
+          <a:xfrm>
+            <a:off x="548640" y="1234440"/>
+            <a:ext cx="11064240" cy="4937760"/>
+          </a:xfrm>
+          <a:prstGeom prst="rect">
+            <a:avLst/>
+          </a:prstGeom>
+          <a:noFill/>
+        </p:spPr>
+        <p:txBody>
+          <a:bodyPr wrap="square">
+            <a:noAutofit/>
+          </a:bodyPr>
+          <a:lstStyle/>
+          <a:p>
+            <a:pPr lvl="0" marL="457200" indent="-228600">
+              <a:buFont typeface="Calibri"/>
+              <a:spcAft>
+                <a:spcPts val="1000"/>
+              </a:spcAft>
+              <a:buSzPct val="100000"/>
+              <a:buChar char="•"/>
+              <a:lnSpc>
+                <a:spcPts val="2200"/>
+              </a:lnSpc>
+            </a:pPr>
+            <a:r>
+              <a:rPr sz="2000" b="0">
+                <a:solidFill>
+                  <a:srgbClr val="333333"/>
+                </a:solidFill>
+                <a:latin typeface="Calibri"/>
+              </a:rPr>
+              <a:t>In the implement track</a:t>
+            </a:r>
+          </a:p>
+          <a:p>
+            <a:pPr lvl="0" marL="457200" indent="-228600">
+              <a:buFont typeface="Calibri"/>
+              <a:spcAft>
+                <a:spcPts val="1000"/>
+              </a:spcAft>
+              <a:buSzPct val="100000"/>
+              <a:buChar char="•"/>
+              <a:lnSpc>
+                <a:spcPts val="2200"/>
+              </a:lnSpc>
+            </a:pPr>
+            <a:r>
+              <a:rPr sz="2000" b="0">
+                <a:solidFill>
+                  <a:srgbClr val="333333"/>
+                </a:solidFill>
+                <a:latin typeface="Calibri"/>
+              </a:rPr>
+              <a:t>Parse the tiny graph, run the algorithm with a deterministic seed</a:t>
+            </a:r>
+          </a:p>
+          <a:p>
+            <a:pPr lvl="0" marL="457200" indent="-228600">
+              <a:buFont typeface="Calibri"/>
+              <a:spcAft>
+                <a:spcPts val="1000"/>
+              </a:spcAft>
+              <a:buSzPct val="100000"/>
+              <a:buChar char="•"/>
+              <a:lnSpc>
+                <a:spcPts val="2200"/>
+              </a:lnSpc>
+            </a:pPr>
+            <a:r>
+              <a:rPr sz="2000" b="0">
+                <a:solidFill>
+                  <a:srgbClr val="333333"/>
+                </a:solidFill>
+                <a:latin typeface="Calibri"/>
+              </a:rPr>
+              <a:t>Match the browser goldens before you claim the checklist</a:t>
+            </a:r>
+          </a:p>
+        </p:txBody>
+      </p:sp>
+      <p:sp>
+        <p:nvSpPr>
+          <p:cNvPr id="4" name="TextBox 3"/>
+          <p:cNvSpPr txBox="1"/>
+          <p:nvPr/>
+        </p:nvSpPr>
+        <p:spPr>
+          <a:xfrm>
+            <a:off x="548640" y="6355080"/>
+            <a:ext cx="11064240" cy="320040"/>
+          </a:xfrm>
+          <a:prstGeom prst="rect">
+            <a:avLst/>
+          </a:prstGeom>
+          <a:noFill/>
+        </p:spPr>
+        <p:txBody>
+          <a:bodyPr wrap="square">
+            <a:noAutofit/>
+          </a:bodyPr>
+          <a:lstStyle/>
+          <a:p>
+            <a:pPr algn="r">
+              <a:lnSpc>
+                <a:spcPts val="2200"/>
+              </a:lnSpc>
+              <a:defRPr sz="1000" b="0">
+                <a:solidFill>
+                  <a:srgbClr val="666666"/>
+                </a:solidFill>
+                <a:latin typeface="Calibri"/>
+              </a:defRPr>
+            </a:pPr>
+            <a:r>
+              <a:t>learn_partitioning — 01 multiway partition</a:t>
+            </a:r>
+          </a:p>
+        </p:txBody>
+      </p:sp>
+    </p:spTree>
+  </p:cSld>
+  <p:clrMapOvr>
+    <a:masterClrMapping/>
+  </p:clrMapOvr>
+</p:sld>
+</file>
+
+<file path=ppt/slides/slide13.xml><?xml version="1.0" encoding="utf-8"?>
+<p:sld xmlns:a="http://schemas.openxmlformats.org/drawingml/2006/main" xmlns:p="http://schemas.openxmlformats.org/presentationml/2006/main" xmlns:r="http://schemas.openxmlformats.org/officeDocument/2006/relationships">
+  <p:cSld>
+    <p:spTree>
+      <p:nvGrpSpPr>
+        <p:cNvPr id="1" name=""/>
+        <p:cNvGrpSpPr/>
+        <p:nvPr/>
+      </p:nvGrpSpPr>
+      <p:grpSpPr/>
+      <p:sp>
+        <p:nvSpPr>
+          <p:cNvPr id="2" name="TextBox 1"/>
+          <p:cNvSpPr txBox="1"/>
+          <p:nvPr/>
+        </p:nvSpPr>
+        <p:spPr>
+          <a:xfrm>
+            <a:off x="548640" y="411480"/>
+            <a:ext cx="11064240" cy="777240"/>
+          </a:xfrm>
+          <a:prstGeom prst="rect">
+            <a:avLst/>
+          </a:prstGeom>
+          <a:noFill/>
+        </p:spPr>
+        <p:txBody>
+          <a:bodyPr wrap="square">
+            <a:noAutofit/>
+          </a:bodyPr>
+          <a:lstStyle/>
+          <a:p>
+            <a:pPr>
+              <a:lnSpc>
+                <a:spcPts val="2200"/>
+              </a:lnSpc>
+            </a:pPr>
+            <a:r>
+              <a:rPr sz="2800" b="1">
+                <a:solidFill>
+                  <a:srgbClr val="1A1A2E"/>
+                </a:solidFill>
+                <a:latin typeface="Calibri"/>
+              </a:rPr>
+              <a:t>Pitfalls</a:t>
+            </a:r>
+          </a:p>
+        </p:txBody>
+      </p:sp>
+      <p:sp>
+        <p:nvSpPr>
+          <p:cNvPr id="3" name="TextBox 2"/>
+          <p:cNvSpPr txBox="1"/>
+          <p:nvPr/>
+        </p:nvSpPr>
+        <p:spPr>
+          <a:xfrm>
+            <a:off x="548640" y="1234440"/>
+            <a:ext cx="11064240" cy="4937760"/>
+          </a:xfrm>
+          <a:prstGeom prst="rect">
+            <a:avLst/>
+          </a:prstGeom>
+          <a:noFill/>
+        </p:spPr>
+        <p:txBody>
+          <a:bodyPr wrap="square">
+            <a:noAutofit/>
+          </a:bodyPr>
+          <a:lstStyle/>
+          <a:p>
+            <a:pPr lvl="0" marL="457200" indent="-228600">
+              <a:buFont typeface="Calibri"/>
+              <a:spcAft>
+                <a:spcPts val="1000"/>
+              </a:spcAft>
+              <a:buSzPct val="100000"/>
+              <a:buChar char="•"/>
+              <a:lnSpc>
+                <a:spcPts val="2200"/>
+              </a:lnSpc>
+            </a:pPr>
+            <a:r>
+              <a:rPr sz="2000" b="0">
+                <a:solidFill>
+                  <a:srgbClr val="333333"/>
+                </a:solidFill>
+                <a:latin typeface="Calibri"/>
+              </a:rPr>
+              <a:t>Common traps</a:t>
+            </a:r>
+          </a:p>
+          <a:p>
+            <a:pPr lvl="0" marL="457200" indent="-228600">
+              <a:buFont typeface="Calibri"/>
+              <a:spcAft>
+                <a:spcPts val="1000"/>
+              </a:spcAft>
+              <a:buSzPct val="100000"/>
+              <a:buChar char="•"/>
+              <a:lnSpc>
+                <a:spcPts val="2200"/>
+              </a:lnSpc>
+            </a:pPr>
+            <a:r>
+              <a:rPr sz="2000" b="0">
+                <a:solidFill>
+                  <a:srgbClr val="333333"/>
+                </a:solidFill>
+                <a:latin typeface="Calibri"/>
+              </a:rPr>
+              <a:t>For multilevel flows, verify coarsening before you blame the refiner</a:t>
+            </a:r>
+          </a:p>
+        </p:txBody>
+      </p:sp>
+      <p:sp>
+        <p:nvSpPr>
+          <p:cNvPr id="4" name="TextBox 3"/>
+          <p:cNvSpPr txBox="1"/>
+          <p:nvPr/>
+        </p:nvSpPr>
+        <p:spPr>
+          <a:xfrm>
+            <a:off x="548640" y="6355080"/>
+            <a:ext cx="11064240" cy="320040"/>
+          </a:xfrm>
+          <a:prstGeom prst="rect">
+            <a:avLst/>
+          </a:prstGeom>
+          <a:noFill/>
+        </p:spPr>
+        <p:txBody>
+          <a:bodyPr wrap="square">
+            <a:noAutofit/>
+          </a:bodyPr>
+          <a:lstStyle/>
+          <a:p>
+            <a:pPr algn="r">
+              <a:lnSpc>
+                <a:spcPts val="2200"/>
+              </a:lnSpc>
+              <a:defRPr sz="1000" b="0">
+                <a:solidFill>
+                  <a:srgbClr val="666666"/>
+                </a:solidFill>
+                <a:latin typeface="Calibri"/>
+              </a:defRPr>
+            </a:pPr>
+            <a:r>
+              <a:t>learn_partitioning — 01 multiway partition</a:t>
+            </a:r>
+          </a:p>
+        </p:txBody>
+      </p:sp>
+    </p:spTree>
+  </p:cSld>
+  <p:clrMapOvr>
+    <a:masterClrMapping/>
+  </p:clrMapOvr>
+</p:sld>
+</file>
+
+<file path=ppt/slides/slide14.xml><?xml version="1.0" encoding="utf-8"?>
+<p:sld xmlns:a="http://schemas.openxmlformats.org/drawingml/2006/main" xmlns:p="http://schemas.openxmlformats.org/presentationml/2006/main" xmlns:r="http://schemas.openxmlformats.org/officeDocument/2006/relationships">
+  <p:cSld>
+    <p:spTree>
+      <p:nvGrpSpPr>
+        <p:cNvPr id="1" name=""/>
+        <p:cNvGrpSpPr/>
+        <p:nvPr/>
+      </p:nvGrpSpPr>
+      <p:grpSpPr/>
+      <p:sp>
+        <p:nvSpPr>
+          <p:cNvPr id="2" name="TextBox 1"/>
+          <p:cNvSpPr txBox="1"/>
+          <p:nvPr/>
+        </p:nvSpPr>
+        <p:spPr>
+          <a:xfrm>
+            <a:off x="548640" y="411480"/>
+            <a:ext cx="11064240" cy="777240"/>
+          </a:xfrm>
+          <a:prstGeom prst="rect">
+            <a:avLst/>
+          </a:prstGeom>
+          <a:noFill/>
+        </p:spPr>
+        <p:txBody>
+          <a:bodyPr wrap="square">
+            <a:noAutofit/>
+          </a:bodyPr>
+          <a:lstStyle/>
+          <a:p>
+            <a:pPr>
+              <a:lnSpc>
+                <a:spcPts val="2200"/>
+              </a:lnSpc>
+            </a:pPr>
+            <a:r>
+              <a:rPr sz="2800" b="1">
+                <a:solidFill>
+                  <a:srgbClr val="1A1A2E"/>
+                </a:solidFill>
+                <a:latin typeface="Calibri"/>
+              </a:rPr>
               <a:t>Your turn</a:t>
             </a:r>
           </a:p>
@@ -4822,6 +5506,125 @@
               <a:t>Teaching point</a:t>
             </a:r>
           </a:p>
+        </p:txBody>
+      </p:sp>
+      <p:sp>
+        <p:nvSpPr>
+          <p:cNvPr id="4" name="TextBox 3"/>
+          <p:cNvSpPr txBox="1"/>
+          <p:nvPr/>
+        </p:nvSpPr>
+        <p:spPr>
+          <a:xfrm>
+            <a:off x="548640" y="6355080"/>
+            <a:ext cx="11064240" cy="320040"/>
+          </a:xfrm>
+          <a:prstGeom prst="rect">
+            <a:avLst/>
+          </a:prstGeom>
+          <a:noFill/>
+        </p:spPr>
+        <p:txBody>
+          <a:bodyPr wrap="square">
+            <a:noAutofit/>
+          </a:bodyPr>
+          <a:lstStyle/>
+          <a:p>
+            <a:pPr algn="r">
+              <a:lnSpc>
+                <a:spcPts val="2200"/>
+              </a:lnSpc>
+              <a:defRPr sz="1000" b="0">
+                <a:solidFill>
+                  <a:srgbClr val="666666"/>
+                </a:solidFill>
+                <a:latin typeface="Calibri"/>
+              </a:defRPr>
+            </a:pPr>
+            <a:r>
+              <a:t>learn_partitioning — 01 multiway partition</a:t>
+            </a:r>
+          </a:p>
+        </p:txBody>
+      </p:sp>
+    </p:spTree>
+  </p:cSld>
+  <p:clrMapOvr>
+    <a:masterClrMapping/>
+  </p:clrMapOvr>
+</p:sld>
+</file>
+
+<file path=ppt/slides/slide3.xml><?xml version="1.0" encoding="utf-8"?>
+<p:sld xmlns:a="http://schemas.openxmlformats.org/drawingml/2006/main" xmlns:p="http://schemas.openxmlformats.org/presentationml/2006/main" xmlns:r="http://schemas.openxmlformats.org/officeDocument/2006/relationships">
+  <p:cSld>
+    <p:spTree>
+      <p:nvGrpSpPr>
+        <p:cNvPr id="1" name=""/>
+        <p:cNvGrpSpPr/>
+        <p:nvPr/>
+      </p:nvGrpSpPr>
+      <p:grpSpPr/>
+      <p:sp>
+        <p:nvSpPr>
+          <p:cNvPr id="2" name="TextBox 1"/>
+          <p:cNvSpPr txBox="1"/>
+          <p:nvPr/>
+        </p:nvSpPr>
+        <p:spPr>
+          <a:xfrm>
+            <a:off x="548640" y="411480"/>
+            <a:ext cx="11064240" cy="777240"/>
+          </a:xfrm>
+          <a:prstGeom prst="rect">
+            <a:avLst/>
+          </a:prstGeom>
+          <a:noFill/>
+        </p:spPr>
+        <p:txBody>
+          <a:bodyPr wrap="square">
+            <a:noAutofit/>
+          </a:bodyPr>
+          <a:lstStyle/>
+          <a:p>
+            <a:pPr>
+              <a:lnSpc>
+                <a:spcPts val="2200"/>
+              </a:lnSpc>
+            </a:pPr>
+            <a:r>
+              <a:rPr sz="2800" b="1">
+                <a:solidFill>
+                  <a:srgbClr val="1A1A2E"/>
+                </a:solidFill>
+                <a:latin typeface="Calibri"/>
+              </a:rPr>
+              <a:t>Pseudocode</a:t>
+            </a:r>
+          </a:p>
+        </p:txBody>
+      </p:sp>
+      <p:sp>
+        <p:nvSpPr>
+          <p:cNvPr id="3" name="TextBox 2"/>
+          <p:cNvSpPr txBox="1"/>
+          <p:nvPr/>
+        </p:nvSpPr>
+        <p:spPr>
+          <a:xfrm>
+            <a:off x="548640" y="1234440"/>
+            <a:ext cx="11064240" cy="4937760"/>
+          </a:xfrm>
+          <a:prstGeom prst="rect">
+            <a:avLst/>
+          </a:prstGeom>
+          <a:noFill/>
+        </p:spPr>
+        <p:txBody>
+          <a:bodyPr wrap="square">
+            <a:noAutofit/>
+          </a:bodyPr>
+          <a:lstStyle/>
           <a:p>
             <a:pPr lvl="0" marL="457200" indent="-228600">
               <a:buFont typeface="Calibri"/>
@@ -4841,7 +5644,73 @@
                 </a:solidFill>
                 <a:latin typeface="Calibri"/>
               </a:rPr>
-              <a:t>&lt;!-- algorithm-walkthrough --&gt;</a:t>
+              <a:t>Multiway compares two constructors in pseudocode</a:t>
+            </a:r>
+          </a:p>
+          <a:p>
+            <a:pPr lvl="0" marL="457200" indent="-228600">
+              <a:buFont typeface="Calibri"/>
+              <a:spcAft>
+                <a:spcPts val="1000"/>
+              </a:spcAft>
+              <a:buSzPct val="100000"/>
+              <a:buChar char="•"/>
+              <a:lnSpc>
+                <a:spcPts val="2200"/>
+              </a:lnSpc>
+            </a:pPr>
+            <a:r>
+              <a:rPr sz="2000" b="0">
+                <a:solidFill>
+                  <a:srgbClr val="333333"/>
+                </a:solidFill>
+                <a:latin typeface="Calibri"/>
+              </a:rPr>
+              <a:t>Both must report the same cutsize metric</a:t>
+            </a:r>
+          </a:p>
+          <a:p>
+            <a:pPr lvl="0" marL="457200" indent="-228600">
+              <a:buFont typeface="Calibri"/>
+              <a:spcAft>
+                <a:spcPts val="1000"/>
+              </a:spcAft>
+              <a:buSzPct val="100000"/>
+              <a:buChar char="•"/>
+              <a:lnSpc>
+                <a:spcPts val="2200"/>
+              </a:lnSpc>
+            </a:pPr>
+            <a:r>
+              <a:rPr sz="2000" b="0">
+                <a:solidFill>
+                  <a:srgbClr val="333333"/>
+                </a:solidFill>
+                <a:latin typeface="Calibri"/>
+              </a:rPr>
+              <a:t>Open this module's examples file and find the Pseudocode section</a:t>
+            </a:r>
+          </a:p>
+          <a:p>
+            <a:pPr lvl="0" marL="457200" indent="-228600">
+              <a:buFont typeface="Calibri"/>
+              <a:spcAft>
+                <a:spcPts val="1000"/>
+              </a:spcAft>
+              <a:buSzPct val="100000"/>
+              <a:buChar char="•"/>
+              <a:lnSpc>
+                <a:spcPts val="2200"/>
+              </a:lnSpc>
+            </a:pPr>
+            <a:r>
+              <a:rPr sz="2000" b="0">
+                <a:solidFill>
+                  <a:srgbClr val="333333"/>
+                </a:solidFill>
+                <a:latin typeface="Calibri"/>
+              </a:rPr>
+              <a:t>That written sketch is what you implement on the implement track and what the browser</a:t>
             </a:r>
           </a:p>
         </p:txBody>
@@ -4893,7 +5762,424 @@
 </p:sld>
 </file>
 
-<file path=ppt/slides/slide3.xml><?xml version="1.0" encoding="utf-8"?>
+<file path=ppt/slides/slide4.xml><?xml version="1.0" encoding="utf-8"?>
+<p:sld xmlns:a="http://schemas.openxmlformats.org/drawingml/2006/main" xmlns:p="http://schemas.openxmlformats.org/presentationml/2006/main" xmlns:r="http://schemas.openxmlformats.org/officeDocument/2006/relationships">
+  <p:cSld>
+    <p:spTree>
+      <p:nvGrpSpPr>
+        <p:cNvPr id="1" name=""/>
+        <p:cNvGrpSpPr/>
+        <p:nvPr/>
+      </p:nvGrpSpPr>
+      <p:grpSpPr/>
+      <p:sp>
+        <p:nvSpPr>
+          <p:cNvPr id="2" name="TextBox 1"/>
+          <p:cNvSpPr txBox="1"/>
+          <p:nvPr/>
+        </p:nvSpPr>
+        <p:spPr>
+          <a:xfrm>
+            <a:off x="548640" y="411480"/>
+            <a:ext cx="11064240" cy="777240"/>
+          </a:xfrm>
+          <a:prstGeom prst="rect">
+            <a:avLst/>
+          </a:prstGeom>
+          <a:noFill/>
+        </p:spPr>
+        <p:txBody>
+          <a:bodyPr wrap="square">
+            <a:noAutofit/>
+          </a:bodyPr>
+          <a:lstStyle/>
+          <a:p>
+            <a:pPr>
+              <a:lnSpc>
+                <a:spcPts val="2200"/>
+              </a:lnSpc>
+            </a:pPr>
+            <a:r>
+              <a:rPr sz="2800" b="1">
+                <a:solidFill>
+                  <a:srgbClr val="1A1A2E"/>
+                </a:solidFill>
+                <a:latin typeface="Calibri"/>
+              </a:rPr>
+              <a:t>Algorithm sketch</a:t>
+            </a:r>
+          </a:p>
+        </p:txBody>
+      </p:sp>
+      <p:sp>
+        <p:nvSpPr>
+          <p:cNvPr id="3" name="TextBox 2"/>
+          <p:cNvSpPr txBox="1"/>
+          <p:nvPr/>
+        </p:nvSpPr>
+        <p:spPr>
+          <a:xfrm>
+            <a:off x="548640" y="1234440"/>
+            <a:ext cx="11064240" cy="4937760"/>
+          </a:xfrm>
+          <a:prstGeom prst="rect">
+            <a:avLst/>
+          </a:prstGeom>
+          <a:noFill/>
+        </p:spPr>
+        <p:txBody>
+          <a:bodyPr wrap="square">
+            <a:noAutofit/>
+          </a:bodyPr>
+          <a:lstStyle/>
+          <a:p>
+            <a:pPr lvl="0" marL="457200" indent="-228600">
+              <a:buFont typeface="Calibri"/>
+              <a:spcAft>
+                <a:spcPts val="1000"/>
+              </a:spcAft>
+              <a:buSzPct val="100000"/>
+              <a:buChar char="•"/>
+              <a:lnSpc>
+                <a:spcPts val="2200"/>
+              </a:lnSpc>
+            </a:pPr>
+            <a:r>
+              <a:rPr sz="2000" b="0">
+                <a:solidFill>
+                  <a:srgbClr val="333333"/>
+                </a:solidFill>
+                <a:latin typeface="Calibri"/>
+              </a:rPr>
+              <a:t>Recursive k equals three lands A B, C, and D E with cut eight</a:t>
+            </a:r>
+          </a:p>
+          <a:p>
+            <a:pPr lvl="0" marL="457200" indent="-228600">
+              <a:buFont typeface="Calibri"/>
+              <a:spcAft>
+                <a:spcPts val="1000"/>
+              </a:spcAft>
+              <a:buSzPct val="100000"/>
+              <a:buChar char="•"/>
+              <a:lnSpc>
+                <a:spcPts val="2200"/>
+              </a:lnSpc>
+            </a:pPr>
+            <a:r>
+              <a:rPr sz="2000" b="0">
+                <a:solidFill>
+                  <a:srgbClr val="333333"/>
+                </a:solidFill>
+                <a:latin typeface="Calibri"/>
+              </a:rPr>
+              <a:t>Alphabetical round-robin shreds heavy edges and scores about eighteen</a:t>
+            </a:r>
+          </a:p>
+        </p:txBody>
+      </p:sp>
+      <p:sp>
+        <p:nvSpPr>
+          <p:cNvPr id="4" name="TextBox 3"/>
+          <p:cNvSpPr txBox="1"/>
+          <p:nvPr/>
+        </p:nvSpPr>
+        <p:spPr>
+          <a:xfrm>
+            <a:off x="548640" y="6355080"/>
+            <a:ext cx="11064240" cy="320040"/>
+          </a:xfrm>
+          <a:prstGeom prst="rect">
+            <a:avLst/>
+          </a:prstGeom>
+          <a:noFill/>
+        </p:spPr>
+        <p:txBody>
+          <a:bodyPr wrap="square">
+            <a:noAutofit/>
+          </a:bodyPr>
+          <a:lstStyle/>
+          <a:p>
+            <a:pPr algn="r">
+              <a:lnSpc>
+                <a:spcPts val="2200"/>
+              </a:lnSpc>
+              <a:defRPr sz="1000" b="0">
+                <a:solidFill>
+                  <a:srgbClr val="666666"/>
+                </a:solidFill>
+                <a:latin typeface="Calibri"/>
+              </a:defRPr>
+            </a:pPr>
+            <a:r>
+              <a:t>learn_partitioning — 01 multiway partition</a:t>
+            </a:r>
+          </a:p>
+        </p:txBody>
+      </p:sp>
+    </p:spTree>
+  </p:cSld>
+  <p:clrMapOvr>
+    <a:masterClrMapping/>
+  </p:clrMapOvr>
+</p:sld>
+</file>
+
+<file path=ppt/slides/slide5.xml><?xml version="1.0" encoding="utf-8"?>
+<p:sld xmlns:a="http://schemas.openxmlformats.org/drawingml/2006/main" xmlns:p="http://schemas.openxmlformats.org/presentationml/2006/main" xmlns:r="http://schemas.openxmlformats.org/officeDocument/2006/relationships">
+  <p:cSld>
+    <p:spTree>
+      <p:nvGrpSpPr>
+        <p:cNvPr id="1" name=""/>
+        <p:cNvGrpSpPr/>
+        <p:nvPr/>
+      </p:nvGrpSpPr>
+      <p:grpSpPr/>
+      <p:sp>
+        <p:nvSpPr>
+          <p:cNvPr id="2" name="TextBox 1"/>
+          <p:cNvSpPr txBox="1"/>
+          <p:nvPr/>
+        </p:nvSpPr>
+        <p:spPr>
+          <a:xfrm>
+            <a:off x="548640" y="411480"/>
+            <a:ext cx="11064240" cy="777240"/>
+          </a:xfrm>
+          <a:prstGeom prst="rect">
+            <a:avLst/>
+          </a:prstGeom>
+          <a:noFill/>
+        </p:spPr>
+        <p:txBody>
+          <a:bodyPr wrap="square">
+            <a:noAutofit/>
+          </a:bodyPr>
+          <a:lstStyle/>
+          <a:p>
+            <a:pPr>
+              <a:lnSpc>
+                <a:spcPts val="2200"/>
+              </a:lnSpc>
+            </a:pPr>
+            <a:r>
+              <a:rPr sz="2800" b="1">
+                <a:solidFill>
+                  <a:srgbClr val="1A1A2E"/>
+                </a:solidFill>
+                <a:latin typeface="Calibri"/>
+              </a:rPr>
+              <a:t>Algorithm sketch — try these</a:t>
+            </a:r>
+          </a:p>
+        </p:txBody>
+      </p:sp>
+      <p:sp>
+        <p:nvSpPr>
+          <p:cNvPr id="3" name="TextBox 2"/>
+          <p:cNvSpPr txBox="1"/>
+          <p:nvPr/>
+        </p:nvSpPr>
+        <p:spPr>
+          <a:xfrm>
+            <a:off x="548640" y="1143000"/>
+            <a:ext cx="11064240" cy="5029200"/>
+          </a:xfrm>
+          <a:prstGeom prst="rect">
+            <a:avLst/>
+          </a:prstGeom>
+          <a:solidFill>
+            <a:srgbClr val="F4F4F4"/>
+          </a:solidFill>
+        </p:spPr>
+        <p:txBody>
+          <a:bodyPr wrap="square">
+            <a:noAutofit/>
+          </a:bodyPr>
+          <a:lstStyle/>
+          <a:p>
+            <a:pPr>
+              <a:lnSpc>
+                <a:spcPts val="2200"/>
+              </a:lnSpc>
+              <a:spcAft>
+                <a:spcPts val="400"/>
+              </a:spcAft>
+            </a:pPr>
+            <a:r>
+              <a:rPr sz="2000" b="0">
+                <a:solidFill>
+                  <a:srgbClr val="333333"/>
+                </a:solidFill>
+                <a:latin typeface="Consolas"/>
+              </a:rPr>
+              <a:t>INPUT: G, k</a:t>
+            </a:r>
+          </a:p>
+          <a:p>
+            <a:pPr>
+              <a:lnSpc>
+                <a:spcPts val="2200"/>
+              </a:lnSpc>
+              <a:spcAft>
+                <a:spcPts val="400"/>
+              </a:spcAft>
+            </a:pPr>
+            <a:r>
+              <a:rPr sz="2000" b="0">
+                <a:solidFill>
+                  <a:srgbClr val="333333"/>
+                </a:solidFill>
+                <a:latin typeface="Consolas"/>
+              </a:rPr>
+              <a:t>OUTPUT: k-way assignment + cutsize</a:t>
+            </a:r>
+          </a:p>
+          <a:p>
+            <a:pPr>
+              <a:lnSpc>
+                <a:spcPts val="2200"/>
+              </a:lnSpc>
+              <a:spcAft>
+                <a:spcPts val="400"/>
+              </a:spcAft>
+            </a:pPr>
+            <a:r>
+              <a:rPr sz="2000" b="0">
+                <a:solidFill>
+                  <a:srgbClr val="333333"/>
+                </a:solidFill>
+                <a:latin typeface="Consolas"/>
+              </a:rPr>
+              <a:t>method A: recursive_bisection(G,k)</a:t>
+            </a:r>
+          </a:p>
+          <a:p>
+            <a:pPr>
+              <a:lnSpc>
+                <a:spcPts val="2200"/>
+              </a:lnSpc>
+              <a:spcAft>
+                <a:spcPts val="400"/>
+              </a:spcAft>
+            </a:pPr>
+            <a:r>
+              <a:rPr sz="2000" b="0">
+                <a:solidFill>
+                  <a:srgbClr val="333333"/>
+                </a:solidFill>
+                <a:latin typeface="Consolas"/>
+              </a:rPr>
+              <a:t>method B: round-robin / block assign labels</a:t>
+            </a:r>
+          </a:p>
+          <a:p>
+            <a:pPr>
+              <a:lnSpc>
+                <a:spcPts val="2200"/>
+              </a:lnSpc>
+              <a:spcAft>
+                <a:spcPts val="400"/>
+              </a:spcAft>
+            </a:pPr>
+            <a:r>
+              <a:rPr sz="2000" b="0">
+                <a:solidFill>
+                  <a:srgbClr val="333333"/>
+                </a:solidFill>
+                <a:latin typeface="Consolas"/>
+              </a:rPr>
+              <a:t>cut ← Σ w where side[u]≠side[v]</a:t>
+            </a:r>
+          </a:p>
+          <a:p>
+            <a:pPr>
+              <a:lnSpc>
+                <a:spcPts val="2200"/>
+              </a:lnSpc>
+              <a:spcAft>
+                <a:spcPts val="400"/>
+              </a:spcAft>
+            </a:pPr>
+            <a:r>
+              <a:rPr sz="2000" b="0">
+                <a:solidFill>
+                  <a:srgbClr val="333333"/>
+                </a:solidFill>
+                <a:latin typeface="Consolas"/>
+              </a:rPr>
+              <a:t>GOLDEN k=3 recursive: AB|C|DE cut=8</a:t>
+            </a:r>
+          </a:p>
+          <a:p>
+            <a:pPr>
+              <a:lnSpc>
+                <a:spcPts val="2200"/>
+              </a:lnSpc>
+              <a:spcAft>
+                <a:spcPts val="400"/>
+              </a:spcAft>
+            </a:pPr>
+            <a:r>
+              <a:rPr sz="2000" b="0">
+                <a:solidFill>
+                  <a:srgbClr val="333333"/>
+                </a:solidFill>
+                <a:latin typeface="Consolas"/>
+              </a:rPr>
+              <a:t>round-robin alphabetic: cut≈18 (worse)</a:t>
+            </a:r>
+          </a:p>
+        </p:txBody>
+      </p:sp>
+      <p:sp>
+        <p:nvSpPr>
+          <p:cNvPr id="4" name="TextBox 3"/>
+          <p:cNvSpPr txBox="1"/>
+          <p:nvPr/>
+        </p:nvSpPr>
+        <p:spPr>
+          <a:xfrm>
+            <a:off x="548640" y="6355080"/>
+            <a:ext cx="11064240" cy="320040"/>
+          </a:xfrm>
+          <a:prstGeom prst="rect">
+            <a:avLst/>
+          </a:prstGeom>
+          <a:noFill/>
+        </p:spPr>
+        <p:txBody>
+          <a:bodyPr wrap="square">
+            <a:noAutofit/>
+          </a:bodyPr>
+          <a:lstStyle/>
+          <a:p>
+            <a:pPr algn="r">
+              <a:lnSpc>
+                <a:spcPts val="2200"/>
+              </a:lnSpc>
+              <a:defRPr sz="1000" b="0">
+                <a:solidFill>
+                  <a:srgbClr val="666666"/>
+                </a:solidFill>
+                <a:latin typeface="Calibri"/>
+              </a:defRPr>
+            </a:pPr>
+            <a:r>
+              <a:t>learn_partitioning — 01 multiway partition</a:t>
+            </a:r>
+          </a:p>
+        </p:txBody>
+      </p:sp>
+    </p:spTree>
+  </p:cSld>
+  <p:clrMapOvr>
+    <a:masterClrMapping/>
+  </p:clrMapOvr>
+</p:sld>
+</file>
+
+<file path=ppt/slides/slide6.xml><?xml version="1.0" encoding="utf-8"?>
 <p:sld xmlns:a="http://schemas.openxmlformats.org/drawingml/2006/main" xmlns:p="http://schemas.openxmlformats.org/presentationml/2006/main" xmlns:r="http://schemas.openxmlformats.org/officeDocument/2006/relationships">
   <p:cSld>
     <p:spTree>
@@ -5052,7 +6338,7 @@
 </p:sld>
 </file>
 
-<file path=ppt/slides/slide4.xml><?xml version="1.0" encoding="utf-8"?>
+<file path=ppt/slides/slide7.xml><?xml version="1.0" encoding="utf-8"?>
 <p:sld xmlns:a="http://schemas.openxmlformats.org/drawingml/2006/main" xmlns:p="http://schemas.openxmlformats.org/presentationml/2006/main" xmlns:r="http://schemas.openxmlformats.org/officeDocument/2006/relationships">
   <p:cSld>
     <p:spTree>
@@ -5211,7 +6497,7 @@
 </p:sld>
 </file>
 
-<file path=ppt/slides/slide5.xml><?xml version="1.0" encoding="utf-8"?>
+<file path=ppt/slides/slide8.xml><?xml version="1.0" encoding="utf-8"?>
 <p:sld xmlns:a="http://schemas.openxmlformats.org/drawingml/2006/main" xmlns:p="http://schemas.openxmlformats.org/presentationml/2006/main" xmlns:r="http://schemas.openxmlformats.org/officeDocument/2006/relationships">
   <p:cSld>
     <p:spTree>
@@ -5370,7 +6656,7 @@
 </p:sld>
 </file>
 
-<file path=ppt/slides/slide6.xml><?xml version="1.0" encoding="utf-8"?>
+<file path=ppt/slides/slide9.xml><?xml version="1.0" encoding="utf-8"?>
 <p:sld xmlns:a="http://schemas.openxmlformats.org/drawingml/2006/main" xmlns:p="http://schemas.openxmlformats.org/presentationml/2006/main" xmlns:r="http://schemas.openxmlformats.org/officeDocument/2006/relationships">
   <p:cSld>
     <p:spTree>
@@ -5485,553 +6771,6 @@
       <p:sp>
         <p:nvSpPr>
           <p:cNvPr id="5" name="TextBox 4"/>
-          <p:cNvSpPr txBox="1"/>
-          <p:nvPr/>
-        </p:nvSpPr>
-        <p:spPr>
-          <a:xfrm>
-            <a:off x="548640" y="6355080"/>
-            <a:ext cx="11064240" cy="320040"/>
-          </a:xfrm>
-          <a:prstGeom prst="rect">
-            <a:avLst/>
-          </a:prstGeom>
-          <a:noFill/>
-        </p:spPr>
-        <p:txBody>
-          <a:bodyPr wrap="square">
-            <a:noAutofit/>
-          </a:bodyPr>
-          <a:lstStyle/>
-          <a:p>
-            <a:pPr algn="r">
-              <a:lnSpc>
-                <a:spcPts val="2200"/>
-              </a:lnSpc>
-              <a:defRPr sz="1000" b="0">
-                <a:solidFill>
-                  <a:srgbClr val="666666"/>
-                </a:solidFill>
-                <a:latin typeface="Calibri"/>
-              </a:defRPr>
-            </a:pPr>
-            <a:r>
-              <a:t>learn_partitioning — 01 multiway partition</a:t>
-            </a:r>
-          </a:p>
-        </p:txBody>
-      </p:sp>
-    </p:spTree>
-  </p:cSld>
-  <p:clrMapOvr>
-    <a:masterClrMapping/>
-  </p:clrMapOvr>
-</p:sld>
-</file>
-
-<file path=ppt/slides/slide7.xml><?xml version="1.0" encoding="utf-8"?>
-<p:sld xmlns:a="http://schemas.openxmlformats.org/drawingml/2006/main" xmlns:p="http://schemas.openxmlformats.org/presentationml/2006/main" xmlns:r="http://schemas.openxmlformats.org/officeDocument/2006/relationships">
-  <p:cSld>
-    <p:spTree>
-      <p:nvGrpSpPr>
-        <p:cNvPr id="1" name=""/>
-        <p:cNvGrpSpPr/>
-        <p:nvPr/>
-      </p:nvGrpSpPr>
-      <p:grpSpPr/>
-      <p:sp>
-        <p:nvSpPr>
-          <p:cNvPr id="2" name="TextBox 1"/>
-          <p:cNvSpPr txBox="1"/>
-          <p:nvPr/>
-        </p:nvSpPr>
-        <p:spPr>
-          <a:xfrm>
-            <a:off x="548640" y="411480"/>
-            <a:ext cx="11064240" cy="777240"/>
-          </a:xfrm>
-          <a:prstGeom prst="rect">
-            <a:avLst/>
-          </a:prstGeom>
-          <a:noFill/>
-        </p:spPr>
-        <p:txBody>
-          <a:bodyPr wrap="square">
-            <a:noAutofit/>
-          </a:bodyPr>
-          <a:lstStyle/>
-          <a:p>
-            <a:pPr>
-              <a:lnSpc>
-                <a:spcPts val="2200"/>
-              </a:lnSpc>
-            </a:pPr>
-            <a:r>
-              <a:rPr sz="2800" b="1">
-                <a:solidFill>
-                  <a:srgbClr val="1A1A2E"/>
-                </a:solidFill>
-                <a:latin typeface="Calibri"/>
-              </a:rPr>
-              <a:t>Multiway literacy</a:t>
-            </a:r>
-          </a:p>
-        </p:txBody>
-      </p:sp>
-      <p:pic>
-        <p:nvPicPr>
-          <p:cNvPr id="3" name="Picture 2" descr="05-takeaway.png"/>
-          <p:cNvPicPr>
-            <a:picLocks noChangeAspect="1"/>
-          </p:cNvPicPr>
-          <p:nvPr/>
-        </p:nvPicPr>
-        <p:blipFill>
-          <a:blip r:embed="rId2"/>
-          <a:stretch>
-            <a:fillRect/>
-          </a:stretch>
-        </p:blipFill>
-        <p:spPr>
-          <a:xfrm>
-            <a:off x="548640" y="1143000"/>
-            <a:ext cx="9404113" cy="4572000"/>
-          </a:xfrm>
-          <a:prstGeom prst="rect">
-            <a:avLst/>
-          </a:prstGeom>
-        </p:spPr>
-      </p:pic>
-      <p:sp>
-        <p:nvSpPr>
-          <p:cNvPr id="4" name="TextBox 3"/>
-          <p:cNvSpPr txBox="1"/>
-          <p:nvPr/>
-        </p:nvSpPr>
-        <p:spPr>
-          <a:xfrm>
-            <a:off x="548640" y="5897880"/>
-            <a:ext cx="11064240" cy="411480"/>
-          </a:xfrm>
-          <a:prstGeom prst="rect">
-            <a:avLst/>
-          </a:prstGeom>
-          <a:noFill/>
-        </p:spPr>
-        <p:txBody>
-          <a:bodyPr wrap="square">
-            <a:noAutofit/>
-          </a:bodyPr>
-          <a:lstStyle/>
-          <a:p>
-            <a:pPr>
-              <a:lnSpc>
-                <a:spcPts val="2200"/>
-              </a:lnSpc>
-            </a:pPr>
-            <a:r>
-              <a:rPr sz="1200" b="0">
-                <a:solidFill>
-                  <a:srgbClr val="333333"/>
-                </a:solidFill>
-                <a:latin typeface="Calibri"/>
-              </a:rPr>
-              <a:t>Multiway literacy</a:t>
-            </a:r>
-          </a:p>
-        </p:txBody>
-      </p:sp>
-      <p:sp>
-        <p:nvSpPr>
-          <p:cNvPr id="5" name="TextBox 4"/>
-          <p:cNvSpPr txBox="1"/>
-          <p:nvPr/>
-        </p:nvSpPr>
-        <p:spPr>
-          <a:xfrm>
-            <a:off x="548640" y="6355080"/>
-            <a:ext cx="11064240" cy="320040"/>
-          </a:xfrm>
-          <a:prstGeom prst="rect">
-            <a:avLst/>
-          </a:prstGeom>
-          <a:noFill/>
-        </p:spPr>
-        <p:txBody>
-          <a:bodyPr wrap="square">
-            <a:noAutofit/>
-          </a:bodyPr>
-          <a:lstStyle/>
-          <a:p>
-            <a:pPr algn="r">
-              <a:lnSpc>
-                <a:spcPts val="2200"/>
-              </a:lnSpc>
-              <a:defRPr sz="1000" b="0">
-                <a:solidFill>
-                  <a:srgbClr val="666666"/>
-                </a:solidFill>
-                <a:latin typeface="Calibri"/>
-              </a:defRPr>
-            </a:pPr>
-            <a:r>
-              <a:t>learn_partitioning — 01 multiway partition</a:t>
-            </a:r>
-          </a:p>
-        </p:txBody>
-      </p:sp>
-    </p:spTree>
-  </p:cSld>
-  <p:clrMapOvr>
-    <a:masterClrMapping/>
-  </p:clrMapOvr>
-</p:sld>
-</file>
-
-<file path=ppt/slides/slide8.xml><?xml version="1.0" encoding="utf-8"?>
-<p:sld xmlns:a="http://schemas.openxmlformats.org/drawingml/2006/main" xmlns:p="http://schemas.openxmlformats.org/presentationml/2006/main" xmlns:r="http://schemas.openxmlformats.org/officeDocument/2006/relationships">
-  <p:cSld>
-    <p:spTree>
-      <p:nvGrpSpPr>
-        <p:cNvPr id="1" name=""/>
-        <p:cNvGrpSpPr/>
-        <p:nvPr/>
-      </p:nvGrpSpPr>
-      <p:grpSpPr/>
-      <p:sp>
-        <p:nvSpPr>
-          <p:cNvPr id="2" name="TextBox 1"/>
-          <p:cNvSpPr txBox="1"/>
-          <p:nvPr/>
-        </p:nvSpPr>
-        <p:spPr>
-          <a:xfrm>
-            <a:off x="548640" y="411480"/>
-            <a:ext cx="11064240" cy="777240"/>
-          </a:xfrm>
-          <a:prstGeom prst="rect">
-            <a:avLst/>
-          </a:prstGeom>
-          <a:noFill/>
-        </p:spPr>
-        <p:txBody>
-          <a:bodyPr wrap="square">
-            <a:noAutofit/>
-          </a:bodyPr>
-          <a:lstStyle/>
-          <a:p>
-            <a:pPr>
-              <a:lnSpc>
-                <a:spcPts val="2200"/>
-              </a:lnSpc>
-            </a:pPr>
-            <a:r>
-              <a:rPr sz="2800" b="1">
-                <a:solidFill>
-                  <a:srgbClr val="1A1A2E"/>
-                </a:solidFill>
-                <a:latin typeface="Calibri"/>
-              </a:rPr>
-              <a:t>Browser lab track</a:t>
-            </a:r>
-          </a:p>
-        </p:txBody>
-      </p:sp>
-      <p:sp>
-        <p:nvSpPr>
-          <p:cNvPr id="3" name="TextBox 2"/>
-          <p:cNvSpPr txBox="1"/>
-          <p:nvPr/>
-        </p:nvSpPr>
-        <p:spPr>
-          <a:xfrm>
-            <a:off x="548640" y="1234440"/>
-            <a:ext cx="11064240" cy="4937760"/>
-          </a:xfrm>
-          <a:prstGeom prst="rect">
-            <a:avLst/>
-          </a:prstGeom>
-          <a:noFill/>
-        </p:spPr>
-        <p:txBody>
-          <a:bodyPr wrap="square">
-            <a:noAutofit/>
-          </a:bodyPr>
-          <a:lstStyle/>
-          <a:p>
-            <a:pPr lvl="0" marL="457200" indent="-228600">
-              <a:buFont typeface="Calibri"/>
-              <a:spcAft>
-                <a:spcPts val="1000"/>
-              </a:spcAft>
-              <a:buSzPct val="100000"/>
-              <a:buChar char="•"/>
-              <a:lnSpc>
-                <a:spcPts val="2200"/>
-              </a:lnSpc>
-            </a:pPr>
-            <a:r>
-              <a:rPr sz="2000" b="0">
-                <a:solidFill>
-                  <a:srgbClr val="333333"/>
-                </a:solidFill>
-                <a:latin typeface="Calibri"/>
-              </a:rPr>
-              <a:t>In the browser lab track, open the </a:t>
-            </a:r>
-            <a:r>
-              <a:rPr sz="2000" b="1">
-                <a:solidFill>
-                  <a:srgbClr val="333333"/>
-                </a:solidFill>
-                <a:latin typeface="Calibri"/>
-              </a:rPr>
-              <a:t>multiway-partition</a:t>
-            </a:r>
-            <a:r>
-              <a:rPr sz="2000" b="0">
-                <a:solidFill>
-                  <a:srgbClr val="333333"/>
-                </a:solidFill>
-                <a:latin typeface="Calibri"/>
-              </a:rPr>
-              <a:t> lab from the tools shelf</a:t>
-            </a:r>
-          </a:p>
-          <a:p>
-            <a:pPr lvl="0" marL="457200" indent="-228600">
-              <a:buFont typeface="Calibri"/>
-              <a:spcAft>
-                <a:spcPts val="1000"/>
-              </a:spcAft>
-              <a:buSzPct val="100000"/>
-              <a:buChar char="•"/>
-              <a:lnSpc>
-                <a:spcPts val="2200"/>
-              </a:lnSpc>
-            </a:pPr>
-            <a:r>
-              <a:rPr sz="2000" b="0">
-                <a:solidFill>
-                  <a:srgbClr val="333333"/>
-                </a:solidFill>
-                <a:latin typeface="Calibri"/>
-              </a:rPr>
-              <a:t>Load the starter graph, run the algorithm once</a:t>
-            </a:r>
-          </a:p>
-          <a:p>
-            <a:pPr lvl="0" marL="457200" indent="-228600">
-              <a:buFont typeface="Calibri"/>
-              <a:spcAft>
-                <a:spcPts val="1000"/>
-              </a:spcAft>
-              <a:buSzPct val="100000"/>
-              <a:buChar char="•"/>
-              <a:lnSpc>
-                <a:spcPts val="2200"/>
-              </a:lnSpc>
-            </a:pPr>
-            <a:r>
-              <a:rPr sz="2000" b="0">
-                <a:solidFill>
-                  <a:srgbClr val="333333"/>
-                </a:solidFill>
-                <a:latin typeface="Calibri"/>
-              </a:rPr>
-              <a:t>Work the challenges that lock the goldens</a:t>
-            </a:r>
-          </a:p>
-        </p:txBody>
-      </p:sp>
-      <p:sp>
-        <p:nvSpPr>
-          <p:cNvPr id="4" name="TextBox 3"/>
-          <p:cNvSpPr txBox="1"/>
-          <p:nvPr/>
-        </p:nvSpPr>
-        <p:spPr>
-          <a:xfrm>
-            <a:off x="548640" y="6355080"/>
-            <a:ext cx="11064240" cy="320040"/>
-          </a:xfrm>
-          <a:prstGeom prst="rect">
-            <a:avLst/>
-          </a:prstGeom>
-          <a:noFill/>
-        </p:spPr>
-        <p:txBody>
-          <a:bodyPr wrap="square">
-            <a:noAutofit/>
-          </a:bodyPr>
-          <a:lstStyle/>
-          <a:p>
-            <a:pPr algn="r">
-              <a:lnSpc>
-                <a:spcPts val="2200"/>
-              </a:lnSpc>
-              <a:defRPr sz="1000" b="0">
-                <a:solidFill>
-                  <a:srgbClr val="666666"/>
-                </a:solidFill>
-                <a:latin typeface="Calibri"/>
-              </a:defRPr>
-            </a:pPr>
-            <a:r>
-              <a:t>learn_partitioning — 01 multiway partition</a:t>
-            </a:r>
-          </a:p>
-        </p:txBody>
-      </p:sp>
-    </p:spTree>
-  </p:cSld>
-  <p:clrMapOvr>
-    <a:masterClrMapping/>
-  </p:clrMapOvr>
-</p:sld>
-</file>
-
-<file path=ppt/slides/slide9.xml><?xml version="1.0" encoding="utf-8"?>
-<p:sld xmlns:a="http://schemas.openxmlformats.org/drawingml/2006/main" xmlns:p="http://schemas.openxmlformats.org/presentationml/2006/main" xmlns:r="http://schemas.openxmlformats.org/officeDocument/2006/relationships">
-  <p:cSld>
-    <p:spTree>
-      <p:nvGrpSpPr>
-        <p:cNvPr id="1" name=""/>
-        <p:cNvGrpSpPr/>
-        <p:nvPr/>
-      </p:nvGrpSpPr>
-      <p:grpSpPr/>
-      <p:sp>
-        <p:nvSpPr>
-          <p:cNvPr id="2" name="TextBox 1"/>
-          <p:cNvSpPr txBox="1"/>
-          <p:nvPr/>
-        </p:nvSpPr>
-        <p:spPr>
-          <a:xfrm>
-            <a:off x="548640" y="411480"/>
-            <a:ext cx="11064240" cy="777240"/>
-          </a:xfrm>
-          <a:prstGeom prst="rect">
-            <a:avLst/>
-          </a:prstGeom>
-          <a:noFill/>
-        </p:spPr>
-        <p:txBody>
-          <a:bodyPr wrap="square">
-            <a:noAutofit/>
-          </a:bodyPr>
-          <a:lstStyle/>
-          <a:p>
-            <a:pPr>
-              <a:lnSpc>
-                <a:spcPts val="2200"/>
-              </a:lnSpc>
-            </a:pPr>
-            <a:r>
-              <a:rPr sz="2800" b="1">
-                <a:solidFill>
-                  <a:srgbClr val="1A1A2E"/>
-                </a:solidFill>
-                <a:latin typeface="Calibri"/>
-              </a:rPr>
-              <a:t>Implement track</a:t>
-            </a:r>
-          </a:p>
-        </p:txBody>
-      </p:sp>
-      <p:sp>
-        <p:nvSpPr>
-          <p:cNvPr id="3" name="TextBox 2"/>
-          <p:cNvSpPr txBox="1"/>
-          <p:nvPr/>
-        </p:nvSpPr>
-        <p:spPr>
-          <a:xfrm>
-            <a:off x="548640" y="1234440"/>
-            <a:ext cx="11064240" cy="4937760"/>
-          </a:xfrm>
-          <a:prstGeom prst="rect">
-            <a:avLst/>
-          </a:prstGeom>
-          <a:noFill/>
-        </p:spPr>
-        <p:txBody>
-          <a:bodyPr wrap="square">
-            <a:noAutofit/>
-          </a:bodyPr>
-          <a:lstStyle/>
-          <a:p>
-            <a:pPr lvl="0" marL="457200" indent="-228600">
-              <a:buFont typeface="Calibri"/>
-              <a:spcAft>
-                <a:spcPts val="1000"/>
-              </a:spcAft>
-              <a:buSzPct val="100000"/>
-              <a:buChar char="•"/>
-              <a:lnSpc>
-                <a:spcPts val="2200"/>
-              </a:lnSpc>
-            </a:pPr>
-            <a:r>
-              <a:rPr sz="2000" b="0">
-                <a:solidFill>
-                  <a:srgbClr val="333333"/>
-                </a:solidFill>
-                <a:latin typeface="Calibri"/>
-              </a:rPr>
-              <a:t>In the implement track, open this module’s examples and the course `common/` solvers</a:t>
-            </a:r>
-          </a:p>
-          <a:p>
-            <a:pPr lvl="0" marL="457200" indent="-228600">
-              <a:buFont typeface="Calibri"/>
-              <a:spcAft>
-                <a:spcPts val="1000"/>
-              </a:spcAft>
-              <a:buSzPct val="100000"/>
-              <a:buChar char="•"/>
-              <a:lnSpc>
-                <a:spcPts val="2200"/>
-              </a:lnSpc>
-            </a:pPr>
-            <a:r>
-              <a:rPr sz="2000" b="0">
-                <a:solidFill>
-                  <a:srgbClr val="333333"/>
-                </a:solidFill>
-                <a:latin typeface="Calibri"/>
-              </a:rPr>
-              <a:t>Parse the tiny graph, run the algorithm with a deterministic seed</a:t>
-            </a:r>
-          </a:p>
-          <a:p>
-            <a:pPr lvl="0" marL="457200" indent="-228600">
-              <a:buFont typeface="Calibri"/>
-              <a:spcAft>
-                <a:spcPts val="1000"/>
-              </a:spcAft>
-              <a:buSzPct val="100000"/>
-              <a:buChar char="•"/>
-              <a:lnSpc>
-                <a:spcPts val="2200"/>
-              </a:lnSpc>
-            </a:pPr>
-            <a:r>
-              <a:rPr sz="2000" b="0">
-                <a:solidFill>
-                  <a:srgbClr val="333333"/>
-                </a:solidFill>
-                <a:latin typeface="Calibri"/>
-              </a:rPr>
-              <a:t>Match the browser goldens before you claim the checklist</a:t>
-            </a:r>
-          </a:p>
-        </p:txBody>
-      </p:sp>
-      <p:sp>
-        <p:nvSpPr>
-          <p:cNvPr id="4" name="TextBox 3"/>
           <p:cNvSpPr txBox="1"/>
           <p:nvPr/>
         </p:nvSpPr>
